--- a/DOKUMENTUMOK/menhelybemutato 1.pptx
+++ b/DOKUMENTUMOK/menhelybemutato 1.pptx
@@ -5,16 +5,18 @@
     <p:sldMasterId id="2147483648" r:id="rId1"/>
   </p:sldMasterIdLst>
   <p:notesMasterIdLst>
-    <p:notesMasterId r:id="rId6"/>
+    <p:notesMasterId r:id="rId8"/>
   </p:notesMasterIdLst>
   <p:handoutMasterIdLst>
-    <p:handoutMasterId r:id="rId7"/>
+    <p:handoutMasterId r:id="rId9"/>
   </p:handoutMasterIdLst>
   <p:sldIdLst>
     <p:sldId id="256" r:id="rId2"/>
     <p:sldId id="257" r:id="rId3"/>
-    <p:sldId id="258" r:id="rId4"/>
-    <p:sldId id="259" r:id="rId5"/>
+    <p:sldId id="260" r:id="rId4"/>
+    <p:sldId id="261" r:id="rId5"/>
+    <p:sldId id="258" r:id="rId6"/>
+    <p:sldId id="259" r:id="rId7"/>
   </p:sldIdLst>
   <p:sldSz cx="12192000" cy="6858000"/>
   <p:notesSz cx="6858000" cy="9144000"/>
@@ -218,7 +220,7 @@
           <a:p>
             <a:fld id="{AEF91C5D-073C-45DE-BBCC-7378CE435FA1}" type="datetime1">
               <a:rPr lang="hu-HU" smtClean="0"/>
-              <a:t>2025. 12. 02.</a:t>
+              <a:t>2026. 01. 09.</a:t>
             </a:fld>
             <a:endParaRPr lang="hu-HU" dirty="0"/>
           </a:p>
@@ -396,7 +398,7 @@
             <a:fld id="{AEAFF75A-AEE5-48D5-8CB6-4873AEBB3F4C}" type="datetime1">
               <a:rPr lang="hu-HU" smtClean="0"/>
               <a:pPr/>
-              <a:t>2025. 12. 02.</a:t>
+              <a:t>2026. 01. 09.</a:t>
             </a:fld>
             <a:endParaRPr lang="hu-HU" dirty="0"/>
           </a:p>
@@ -888,6 +890,90 @@
 </p:notes>
 </file>
 
+<file path=ppt/notesSlides/notesSlide3.xml><?xml version="1.0" encoding="utf-8"?>
+<p:notes xmlns:a="http://schemas.openxmlformats.org/drawingml/2006/main" xmlns:r="http://schemas.openxmlformats.org/officeDocument/2006/relationships" xmlns:p="http://schemas.openxmlformats.org/presentationml/2006/main">
+  <p:cSld>
+    <p:spTree>
+      <p:nvGrpSpPr>
+        <p:cNvPr id="1" name=""/>
+        <p:cNvGrpSpPr/>
+        <p:nvPr/>
+      </p:nvGrpSpPr>
+      <p:grpSpPr>
+        <a:xfrm>
+          <a:off x="0" y="0"/>
+          <a:ext cx="0" cy="0"/>
+          <a:chOff x="0" y="0"/>
+          <a:chExt cx="0" cy="0"/>
+        </a:xfrm>
+      </p:grpSpPr>
+      <p:sp>
+        <p:nvSpPr>
+          <p:cNvPr id="2" name="Diakép helye 1"/>
+          <p:cNvSpPr>
+            <a:spLocks noGrp="1" noRot="1" noChangeAspect="1"/>
+          </p:cNvSpPr>
+          <p:nvPr>
+            <p:ph type="sldImg"/>
+          </p:nvPr>
+        </p:nvSpPr>
+        <p:spPr/>
+      </p:sp>
+      <p:sp>
+        <p:nvSpPr>
+          <p:cNvPr id="3" name="Jegyzetek helye 2"/>
+          <p:cNvSpPr>
+            <a:spLocks noGrp="1"/>
+          </p:cNvSpPr>
+          <p:nvPr>
+            <p:ph type="body" idx="1"/>
+          </p:nvPr>
+        </p:nvSpPr>
+        <p:spPr/>
+        <p:txBody>
+          <a:bodyPr/>
+          <a:lstStyle/>
+          <a:p>
+            <a:endParaRPr lang="hu-HU" dirty="0"/>
+          </a:p>
+        </p:txBody>
+      </p:sp>
+      <p:sp>
+        <p:nvSpPr>
+          <p:cNvPr id="4" name="Dia számának helye 3"/>
+          <p:cNvSpPr>
+            <a:spLocks noGrp="1"/>
+          </p:cNvSpPr>
+          <p:nvPr>
+            <p:ph type="sldNum" sz="quarter" idx="5"/>
+          </p:nvPr>
+        </p:nvSpPr>
+        <p:spPr/>
+        <p:txBody>
+          <a:bodyPr/>
+          <a:lstStyle/>
+          <a:p>
+            <a:fld id="{D1A8A364-3D9A-4EC8-959B-291924AF7E56}" type="slidenum">
+              <a:rPr lang="hu-HU" noProof="0" smtClean="0"/>
+              <a:t>3</a:t>
+            </a:fld>
+            <a:endParaRPr lang="hu-HU" noProof="0"/>
+          </a:p>
+        </p:txBody>
+      </p:sp>
+    </p:spTree>
+    <p:extLst>
+      <p:ext uri="{BB962C8B-B14F-4D97-AF65-F5344CB8AC3E}">
+        <p14:creationId xmlns:p14="http://schemas.microsoft.com/office/powerpoint/2010/main" val="1786564304"/>
+      </p:ext>
+    </p:extLst>
+  </p:cSld>
+  <p:clrMapOvr>
+    <a:masterClrMapping/>
+  </p:clrMapOvr>
+</p:notes>
+</file>
+
 <file path=ppt/slideLayouts/slideLayout1.xml><?xml version="1.0" encoding="utf-8"?>
 <p:sldLayout xmlns:a="http://schemas.openxmlformats.org/drawingml/2006/main" xmlns:r="http://schemas.openxmlformats.org/officeDocument/2006/relationships" xmlns:p="http://schemas.openxmlformats.org/presentationml/2006/main" type="title" preserve="1">
   <p:cSld name="Címdia">
@@ -1028,7 +1114,7 @@
             <a:pPr rtl="0"/>
             <a:fld id="{4357C712-04B1-43F6-A268-30DD1DB5F6B9}" type="datetime1">
               <a:rPr lang="hu-HU" noProof="0" smtClean="0"/>
-              <a:t>2025. 12. 02.</a:t>
+              <a:t>2026. 01. 09.</a:t>
             </a:fld>
             <a:endParaRPr lang="hu-HU" noProof="0"/>
           </a:p>
@@ -1236,7 +1322,7 @@
             <a:pPr rtl="0"/>
             <a:fld id="{37F7EF17-0CEC-4E1D-AEE0-AF901F2B6DF3}" type="datetime1">
               <a:rPr lang="hu-HU" noProof="0" smtClean="0"/>
-              <a:t>2025. 12. 02.</a:t>
+              <a:t>2026. 01. 09.</a:t>
             </a:fld>
             <a:endParaRPr lang="hu-HU" noProof="0"/>
           </a:p>
@@ -1448,7 +1534,7 @@
             <a:pPr rtl="0"/>
             <a:fld id="{7A490ACC-DB94-4540-9689-013867EC8522}" type="datetime1">
               <a:rPr lang="hu-HU" noProof="0" smtClean="0"/>
-              <a:t>2025. 12. 02.</a:t>
+              <a:t>2026. 01. 09.</a:t>
             </a:fld>
             <a:endParaRPr lang="hu-HU" noProof="0"/>
           </a:p>
@@ -1646,7 +1732,7 @@
             <a:pPr rtl="0"/>
             <a:fld id="{263C02BF-1388-4F21-B877-03B08F3169CC}" type="datetime1">
               <a:rPr lang="hu-HU" noProof="0" smtClean="0"/>
-              <a:t>2025. 12. 02.</a:t>
+              <a:t>2026. 01. 09.</a:t>
             </a:fld>
             <a:endParaRPr lang="hu-HU" noProof="0"/>
           </a:p>
@@ -1923,7 +2009,7 @@
             <a:pPr rtl="0"/>
             <a:fld id="{20ED032A-13F3-4ED4-BC67-027BABAB85B7}" type="datetime1">
               <a:rPr lang="hu-HU" noProof="0" smtClean="0"/>
-              <a:t>2025. 12. 02.</a:t>
+              <a:t>2026. 01. 09.</a:t>
             </a:fld>
             <a:endParaRPr lang="hu-HU" noProof="0"/>
           </a:p>
@@ -2187,7 +2273,7 @@
             <a:pPr rtl="0"/>
             <a:fld id="{1B63A5F8-6802-46B0-8655-054EB3F33294}" type="datetime1">
               <a:rPr lang="hu-HU" noProof="0" smtClean="0"/>
-              <a:t>2025. 12. 02.</a:t>
+              <a:t>2026. 01. 09.</a:t>
             </a:fld>
             <a:endParaRPr lang="hu-HU" noProof="0"/>
           </a:p>
@@ -2599,7 +2685,7 @@
             <a:pPr rtl="0"/>
             <a:fld id="{9BD259E6-F7D8-40B4-9CB6-4D3A05A7DB1B}" type="datetime1">
               <a:rPr lang="hu-HU" noProof="0" smtClean="0"/>
-              <a:t>2025. 12. 02.</a:t>
+              <a:t>2026. 01. 09.</a:t>
             </a:fld>
             <a:endParaRPr lang="hu-HU" noProof="0"/>
           </a:p>
@@ -2746,7 +2832,7 @@
             <a:pPr rtl="0"/>
             <a:fld id="{BFB5B7E0-EB02-4D60-87FB-F8D56D6AF0A1}" type="datetime1">
               <a:rPr lang="hu-HU" noProof="0" smtClean="0"/>
-              <a:t>2025. 12. 02.</a:t>
+              <a:t>2026. 01. 09.</a:t>
             </a:fld>
             <a:endParaRPr lang="hu-HU" noProof="0"/>
           </a:p>
@@ -2870,7 +2956,7 @@
             <a:pPr rtl="0"/>
             <a:fld id="{31A187BE-59B2-40D1-AFF9-4EF9E6191442}" type="datetime1">
               <a:rPr lang="hu-HU" noProof="0" smtClean="0"/>
-              <a:t>2025. 12. 02.</a:t>
+              <a:t>2026. 01. 09.</a:t>
             </a:fld>
             <a:endParaRPr lang="hu-HU" noProof="0"/>
           </a:p>
@@ -3118,7 +3204,7 @@
             <a:pPr rtl="0"/>
             <a:fld id="{045A636F-6057-47D2-9DFE-4EF30B79ACEE}" type="datetime1">
               <a:rPr lang="hu-HU" noProof="0" smtClean="0"/>
-              <a:t>2025. 12. 02.</a:t>
+              <a:t>2026. 01. 09.</a:t>
             </a:fld>
             <a:endParaRPr lang="hu-HU" noProof="0"/>
           </a:p>
@@ -3561,7 +3647,7 @@
             <a:pPr rtl="0"/>
             <a:fld id="{C8C4B5B9-172A-4BBF-8B01-E9076FCA0CEB}" type="datetime1">
               <a:rPr lang="hu-HU" noProof="0" smtClean="0"/>
-              <a:t>2025. 12. 02.</a:t>
+              <a:t>2026. 01. 09.</a:t>
             </a:fld>
             <a:endParaRPr lang="hu-HU" noProof="0"/>
           </a:p>
@@ -3885,7 +3971,7 @@
             <a:pPr rtl="0"/>
             <a:fld id="{54064E28-58B8-4DA9-B1C8-AF15F279E04B}" type="datetime1">
               <a:rPr lang="hu-HU" noProof="0" smtClean="0"/>
-              <a:t>2025. 12. 02.</a:t>
+              <a:t>2026. 01. 09.</a:t>
             </a:fld>
             <a:endParaRPr lang="hu-HU" noProof="0"/>
           </a:p>
@@ -4741,6 +4827,491 @@
           <p:cNvPr id="2" name="Cím 1">
             <a:extLst>
               <a:ext uri="{FF2B5EF4-FFF2-40B4-BE49-F238E27FC236}">
+                <a16:creationId xmlns:a16="http://schemas.microsoft.com/office/drawing/2014/main" id="{317103D2-A76A-47AB-92D4-E42F72993C7E}"/>
+              </a:ext>
+            </a:extLst>
+          </p:cNvPr>
+          <p:cNvSpPr>
+            <a:spLocks noGrp="1"/>
+          </p:cNvSpPr>
+          <p:nvPr>
+            <p:ph type="title"/>
+          </p:nvPr>
+        </p:nvSpPr>
+        <p:spPr>
+          <a:xfrm>
+            <a:off x="1294362" y="610555"/>
+            <a:ext cx="9603275" cy="1049235"/>
+          </a:xfrm>
+        </p:spPr>
+        <p:txBody>
+          <a:bodyPr/>
+          <a:lstStyle/>
+          <a:p>
+            <a:r>
+              <a:rPr lang="hu-HU" dirty="0" err="1"/>
+              <a:t>Our</a:t>
+            </a:r>
+            <a:r>
+              <a:rPr lang="hu-HU" dirty="0"/>
+              <a:t> </a:t>
+            </a:r>
+            <a:r>
+              <a:rPr lang="hu-HU" dirty="0" err="1"/>
+              <a:t>Dogs</a:t>
+            </a:r>
+            <a:r>
+              <a:rPr lang="hu-HU" dirty="0"/>
+              <a:t> </a:t>
+            </a:r>
+            <a:r>
+              <a:rPr lang="hu-HU" dirty="0" err="1"/>
+              <a:t>for</a:t>
+            </a:r>
+            <a:r>
+              <a:rPr lang="hu-HU" dirty="0"/>
+              <a:t> </a:t>
+            </a:r>
+            <a:r>
+              <a:rPr lang="hu-HU" dirty="0" err="1"/>
+              <a:t>Adoption</a:t>
+            </a:r>
+            <a:endParaRPr lang="hu-HU" dirty="0"/>
+          </a:p>
+        </p:txBody>
+      </p:sp>
+      <p:pic>
+        <p:nvPicPr>
+          <p:cNvPr id="5" name="Tartalom helye 4">
+            <a:extLst>
+              <a:ext uri="{FF2B5EF4-FFF2-40B4-BE49-F238E27FC236}">
+                <a16:creationId xmlns:a16="http://schemas.microsoft.com/office/drawing/2014/main" id="{2793E94D-544F-486F-BF63-CCBEA4936367}"/>
+              </a:ext>
+            </a:extLst>
+          </p:cNvPr>
+          <p:cNvPicPr>
+            <a:picLocks noGrp="1" noChangeAspect="1"/>
+          </p:cNvPicPr>
+          <p:nvPr>
+            <p:ph idx="1"/>
+          </p:nvPr>
+        </p:nvPicPr>
+        <p:blipFill>
+          <a:blip r:embed="rId3"/>
+          <a:stretch>
+            <a:fillRect/>
+          </a:stretch>
+        </p:blipFill>
+        <p:spPr>
+          <a:xfrm>
+            <a:off x="212778" y="3879275"/>
+            <a:ext cx="4875114" cy="2036763"/>
+          </a:xfrm>
+        </p:spPr>
+      </p:pic>
+      <p:sp>
+        <p:nvSpPr>
+          <p:cNvPr id="6" name="Szövegdoboz 5">
+            <a:extLst>
+              <a:ext uri="{FF2B5EF4-FFF2-40B4-BE49-F238E27FC236}">
+                <a16:creationId xmlns:a16="http://schemas.microsoft.com/office/drawing/2014/main" id="{2513D95C-00AF-450C-878E-7C2037EA0DCC}"/>
+              </a:ext>
+            </a:extLst>
+          </p:cNvPr>
+          <p:cNvSpPr txBox="1"/>
+          <p:nvPr/>
+        </p:nvSpPr>
+        <p:spPr>
+          <a:xfrm>
+            <a:off x="379033" y="2193853"/>
+            <a:ext cx="4142509" cy="1477328"/>
+          </a:xfrm>
+          <a:prstGeom prst="rect">
+            <a:avLst/>
+          </a:prstGeom>
+          <a:noFill/>
+        </p:spPr>
+        <p:txBody>
+          <a:bodyPr wrap="square" rtlCol="0">
+            <a:spAutoFit/>
+          </a:bodyPr>
+          <a:lstStyle/>
+          <a:p>
+            <a:r>
+              <a:rPr lang="en-US" b="1" i="0" dirty="0">
+                <a:effectLst/>
+                <a:latin typeface="Roboto" panose="020B0604020202020204" pitchFamily="2" charset="0"/>
+              </a:rPr>
+              <a:t>Here you can see our dogs available for adoption</a:t>
+            </a:r>
+            <a:endParaRPr lang="hu-HU" b="1" i="0" dirty="0">
+              <a:effectLst/>
+              <a:latin typeface="Roboto" panose="020B0604020202020204" pitchFamily="2" charset="0"/>
+            </a:endParaRPr>
+          </a:p>
+          <a:p>
+            <a:r>
+              <a:rPr lang="en-US" b="1" i="0" dirty="0">
+                <a:effectLst/>
+                <a:latin typeface="Roboto" panose="02000000000000000000" pitchFamily="2" charset="0"/>
+              </a:rPr>
+              <a:t>If you click on one of the dogs, it will take you further and show you some information about it.</a:t>
+            </a:r>
+            <a:r>
+              <a:rPr lang="hu-HU" b="1" i="0" dirty="0">
+                <a:effectLst/>
+                <a:latin typeface="Roboto" panose="02000000000000000000" pitchFamily="2" charset="0"/>
+              </a:rPr>
+              <a:t> 			</a:t>
+            </a:r>
+            <a:r>
+              <a:rPr lang="hu-HU" b="1" i="0" dirty="0">
+                <a:effectLst/>
+                <a:latin typeface="Roboto" panose="02000000000000000000" pitchFamily="2" charset="0"/>
+                <a:sym typeface="Wingdings" panose="05000000000000000000" pitchFamily="2" charset="2"/>
+              </a:rPr>
+              <a:t></a:t>
+            </a:r>
+            <a:endParaRPr lang="hu-HU" dirty="0"/>
+          </a:p>
+        </p:txBody>
+      </p:sp>
+      <p:pic>
+        <p:nvPicPr>
+          <p:cNvPr id="8" name="Kép 7">
+            <a:extLst>
+              <a:ext uri="{FF2B5EF4-FFF2-40B4-BE49-F238E27FC236}">
+                <a16:creationId xmlns:a16="http://schemas.microsoft.com/office/drawing/2014/main" id="{F5296E3A-E97A-468A-ACEB-BE1520D9605A}"/>
+              </a:ext>
+            </a:extLst>
+          </p:cNvPr>
+          <p:cNvPicPr>
+            <a:picLocks noChangeAspect="1"/>
+          </p:cNvPicPr>
+          <p:nvPr/>
+        </p:nvPicPr>
+        <p:blipFill>
+          <a:blip r:embed="rId4"/>
+          <a:stretch>
+            <a:fillRect/>
+          </a:stretch>
+        </p:blipFill>
+        <p:spPr>
+          <a:xfrm>
+            <a:off x="5708073" y="1492657"/>
+            <a:ext cx="2220112" cy="2395055"/>
+          </a:xfrm>
+          <a:prstGeom prst="rect">
+            <a:avLst/>
+          </a:prstGeom>
+        </p:spPr>
+      </p:pic>
+      <p:sp>
+        <p:nvSpPr>
+          <p:cNvPr id="9" name="Szövegdoboz 8">
+            <a:extLst>
+              <a:ext uri="{FF2B5EF4-FFF2-40B4-BE49-F238E27FC236}">
+                <a16:creationId xmlns:a16="http://schemas.microsoft.com/office/drawing/2014/main" id="{233FF872-122A-4F6D-AEE5-8A5E39ED7E6B}"/>
+              </a:ext>
+            </a:extLst>
+          </p:cNvPr>
+          <p:cNvSpPr txBox="1"/>
+          <p:nvPr/>
+        </p:nvSpPr>
+        <p:spPr>
+          <a:xfrm>
+            <a:off x="8381071" y="2193853"/>
+            <a:ext cx="2327564" cy="1477328"/>
+          </a:xfrm>
+          <a:prstGeom prst="rect">
+            <a:avLst/>
+          </a:prstGeom>
+          <a:noFill/>
+        </p:spPr>
+        <p:txBody>
+          <a:bodyPr wrap="square" rtlCol="0">
+            <a:spAutoFit/>
+          </a:bodyPr>
+          <a:lstStyle/>
+          <a:p>
+            <a:r>
+              <a:rPr lang="en-US" b="1" i="0" dirty="0">
+                <a:effectLst/>
+                <a:latin typeface="Roboto" panose="02000000000000000000" pitchFamily="2" charset="0"/>
+              </a:rPr>
+              <a:t>Here you can see the details about him, and if you like the dog, you can click on adoption.</a:t>
+            </a:r>
+            <a:endParaRPr lang="hu-HU" dirty="0"/>
+          </a:p>
+        </p:txBody>
+      </p:sp>
+      <p:cxnSp>
+        <p:nvCxnSpPr>
+          <p:cNvPr id="12" name="Egyenes összekötő nyíllal 11">
+            <a:extLst>
+              <a:ext uri="{FF2B5EF4-FFF2-40B4-BE49-F238E27FC236}">
+                <a16:creationId xmlns:a16="http://schemas.microsoft.com/office/drawing/2014/main" id="{3074986D-EA00-468D-BFFB-1CAB0849F983}"/>
+              </a:ext>
+            </a:extLst>
+          </p:cNvPr>
+          <p:cNvCxnSpPr>
+            <a:cxnSpLocks/>
+          </p:cNvCxnSpPr>
+          <p:nvPr/>
+        </p:nvCxnSpPr>
+        <p:spPr>
+          <a:xfrm flipH="1">
+            <a:off x="7104110" y="3546764"/>
+            <a:ext cx="1831143" cy="124417"/>
+          </a:xfrm>
+          <a:prstGeom prst="straightConnector1">
+            <a:avLst/>
+          </a:prstGeom>
+          <a:ln>
+            <a:tailEnd type="triangle"/>
+          </a:ln>
+        </p:spPr>
+        <p:style>
+          <a:lnRef idx="1">
+            <a:schemeClr val="accent1"/>
+          </a:lnRef>
+          <a:fillRef idx="0">
+            <a:schemeClr val="accent1"/>
+          </a:fillRef>
+          <a:effectRef idx="0">
+            <a:schemeClr val="accent1"/>
+          </a:effectRef>
+          <a:fontRef idx="minor">
+            <a:schemeClr val="tx1"/>
+          </a:fontRef>
+        </p:style>
+      </p:cxnSp>
+      <p:sp>
+        <p:nvSpPr>
+          <p:cNvPr id="14" name="Szövegdoboz 13">
+            <a:extLst>
+              <a:ext uri="{FF2B5EF4-FFF2-40B4-BE49-F238E27FC236}">
+                <a16:creationId xmlns:a16="http://schemas.microsoft.com/office/drawing/2014/main" id="{8749B88F-A4BD-4B80-A707-824C41AE83DC}"/>
+              </a:ext>
+            </a:extLst>
+          </p:cNvPr>
+          <p:cNvSpPr txBox="1"/>
+          <p:nvPr/>
+        </p:nvSpPr>
+        <p:spPr>
+          <a:xfrm>
+            <a:off x="5587068" y="4311941"/>
+            <a:ext cx="6392154" cy="923330"/>
+          </a:xfrm>
+          <a:prstGeom prst="rect">
+            <a:avLst/>
+          </a:prstGeom>
+          <a:noFill/>
+        </p:spPr>
+        <p:txBody>
+          <a:bodyPr wrap="square" rtlCol="0">
+            <a:spAutoFit/>
+          </a:bodyPr>
+          <a:lstStyle/>
+          <a:p>
+            <a:r>
+              <a:rPr lang="en-US" b="1" i="0" dirty="0">
+                <a:effectLst/>
+                <a:latin typeface="Roboto" panose="02000000000000000000" pitchFamily="2" charset="0"/>
+              </a:rPr>
+              <a:t>As soon as you fill out the form with your information, we will receive the request and review it as quickly as possible and get back to you.</a:t>
+            </a:r>
+            <a:endParaRPr lang="hu-HU" dirty="0"/>
+          </a:p>
+        </p:txBody>
+      </p:sp>
+    </p:spTree>
+    <p:extLst>
+      <p:ext uri="{BB962C8B-B14F-4D97-AF65-F5344CB8AC3E}">
+        <p14:creationId xmlns:p14="http://schemas.microsoft.com/office/powerpoint/2010/main" val="1653305199"/>
+      </p:ext>
+    </p:extLst>
+  </p:cSld>
+  <p:clrMapOvr>
+    <a:masterClrMapping/>
+  </p:clrMapOvr>
+</p:sld>
+</file>
+
+<file path=ppt/slides/slide4.xml><?xml version="1.0" encoding="utf-8"?>
+<p:sld xmlns:a="http://schemas.openxmlformats.org/drawingml/2006/main" xmlns:r="http://schemas.openxmlformats.org/officeDocument/2006/relationships" xmlns:p="http://schemas.openxmlformats.org/presentationml/2006/main">
+  <p:cSld>
+    <p:spTree>
+      <p:nvGrpSpPr>
+        <p:cNvPr id="1" name=""/>
+        <p:cNvGrpSpPr/>
+        <p:nvPr/>
+      </p:nvGrpSpPr>
+      <p:grpSpPr>
+        <a:xfrm>
+          <a:off x="0" y="0"/>
+          <a:ext cx="0" cy="0"/>
+          <a:chOff x="0" y="0"/>
+          <a:chExt cx="0" cy="0"/>
+        </a:xfrm>
+      </p:grpSpPr>
+      <p:sp>
+        <p:nvSpPr>
+          <p:cNvPr id="2" name="Cím 1">
+            <a:extLst>
+              <a:ext uri="{FF2B5EF4-FFF2-40B4-BE49-F238E27FC236}">
+                <a16:creationId xmlns:a16="http://schemas.microsoft.com/office/drawing/2014/main" id="{02FD2F86-BB9D-4B98-8486-613CEB7117A6}"/>
+              </a:ext>
+            </a:extLst>
+          </p:cNvPr>
+          <p:cNvSpPr>
+            <a:spLocks noGrp="1"/>
+          </p:cNvSpPr>
+          <p:nvPr>
+            <p:ph type="title"/>
+          </p:nvPr>
+        </p:nvSpPr>
+        <p:spPr/>
+        <p:txBody>
+          <a:bodyPr/>
+          <a:lstStyle/>
+          <a:p>
+            <a:r>
+              <a:rPr lang="hu-HU" dirty="0" err="1"/>
+              <a:t>About</a:t>
+            </a:r>
+            <a:r>
+              <a:rPr lang="hu-HU" dirty="0"/>
+              <a:t> </a:t>
+            </a:r>
+            <a:r>
+              <a:rPr lang="hu-HU" dirty="0" err="1"/>
+              <a:t>us</a:t>
+            </a:r>
+            <a:r>
+              <a:rPr lang="hu-HU" dirty="0"/>
+              <a:t> </a:t>
+            </a:r>
+          </a:p>
+        </p:txBody>
+      </p:sp>
+      <p:pic>
+        <p:nvPicPr>
+          <p:cNvPr id="5" name="Tartalom helye 4">
+            <a:extLst>
+              <a:ext uri="{FF2B5EF4-FFF2-40B4-BE49-F238E27FC236}">
+                <a16:creationId xmlns:a16="http://schemas.microsoft.com/office/drawing/2014/main" id="{3D84EC81-C777-4EBF-81F4-7FA5E3B43792}"/>
+              </a:ext>
+            </a:extLst>
+          </p:cNvPr>
+          <p:cNvPicPr>
+            <a:picLocks noGrp="1" noChangeAspect="1"/>
+          </p:cNvPicPr>
+          <p:nvPr>
+            <p:ph idx="1"/>
+          </p:nvPr>
+        </p:nvPicPr>
+        <p:blipFill>
+          <a:blip r:embed="rId2"/>
+          <a:stretch>
+            <a:fillRect/>
+          </a:stretch>
+        </p:blipFill>
+        <p:spPr>
+          <a:xfrm>
+            <a:off x="482834" y="2141960"/>
+            <a:ext cx="5265693" cy="3449638"/>
+          </a:xfrm>
+        </p:spPr>
+      </p:pic>
+      <p:sp>
+        <p:nvSpPr>
+          <p:cNvPr id="6" name="Szövegdoboz 5">
+            <a:extLst>
+              <a:ext uri="{FF2B5EF4-FFF2-40B4-BE49-F238E27FC236}">
+                <a16:creationId xmlns:a16="http://schemas.microsoft.com/office/drawing/2014/main" id="{D9D338B3-A7FB-4253-BDCE-94B259D64AA6}"/>
+              </a:ext>
+            </a:extLst>
+          </p:cNvPr>
+          <p:cNvSpPr txBox="1"/>
+          <p:nvPr/>
+        </p:nvSpPr>
+        <p:spPr>
+          <a:xfrm>
+            <a:off x="6543412" y="2549004"/>
+            <a:ext cx="3733103" cy="1200329"/>
+          </a:xfrm>
+          <a:prstGeom prst="rect">
+            <a:avLst/>
+          </a:prstGeom>
+          <a:noFill/>
+        </p:spPr>
+        <p:txBody>
+          <a:bodyPr wrap="square" rtlCol="0">
+            <a:spAutoFit/>
+          </a:bodyPr>
+          <a:lstStyle/>
+          <a:p>
+            <a:r>
+              <a:rPr lang="en-US" b="1" i="0" dirty="0">
+                <a:effectLst/>
+                <a:latin typeface="Roboto" panose="02000000000000000000" pitchFamily="2" charset="0"/>
+              </a:rPr>
+              <a:t>Here you can see a little description about us, our names, what our goal is, and a picture of us. (</a:t>
+            </a:r>
+            <a:r>
+              <a:rPr lang="en-US" b="1" i="0" dirty="0" err="1">
+                <a:effectLst/>
+                <a:latin typeface="Roboto" panose="02000000000000000000" pitchFamily="2" charset="0"/>
+              </a:rPr>
+              <a:t>Norbi</a:t>
+            </a:r>
+            <a:r>
+              <a:rPr lang="en-US" b="1" i="0" dirty="0">
+                <a:effectLst/>
+                <a:latin typeface="Roboto" panose="02000000000000000000" pitchFamily="2" charset="0"/>
+              </a:rPr>
+              <a:t> is not in the picture yet)</a:t>
+            </a:r>
+            <a:endParaRPr lang="hu-HU" dirty="0"/>
+          </a:p>
+        </p:txBody>
+      </p:sp>
+    </p:spTree>
+    <p:extLst>
+      <p:ext uri="{BB962C8B-B14F-4D97-AF65-F5344CB8AC3E}">
+        <p14:creationId xmlns:p14="http://schemas.microsoft.com/office/powerpoint/2010/main" val="2174931022"/>
+      </p:ext>
+    </p:extLst>
+  </p:cSld>
+  <p:clrMapOvr>
+    <a:masterClrMapping/>
+  </p:clrMapOvr>
+</p:sld>
+</file>
+
+<file path=ppt/slides/slide5.xml><?xml version="1.0" encoding="utf-8"?>
+<p:sld xmlns:a="http://schemas.openxmlformats.org/drawingml/2006/main" xmlns:r="http://schemas.openxmlformats.org/officeDocument/2006/relationships" xmlns:p="http://schemas.openxmlformats.org/presentationml/2006/main">
+  <p:cSld>
+    <p:spTree>
+      <p:nvGrpSpPr>
+        <p:cNvPr id="1" name=""/>
+        <p:cNvGrpSpPr/>
+        <p:nvPr/>
+      </p:nvGrpSpPr>
+      <p:grpSpPr>
+        <a:xfrm>
+          <a:off x="0" y="0"/>
+          <a:ext cx="0" cy="0"/>
+          <a:chOff x="0" y="0"/>
+          <a:chExt cx="0" cy="0"/>
+        </a:xfrm>
+      </p:grpSpPr>
+      <p:sp>
+        <p:nvSpPr>
+          <p:cNvPr id="2" name="Cím 1">
+            <a:extLst>
+              <a:ext uri="{FF2B5EF4-FFF2-40B4-BE49-F238E27FC236}">
                 <a16:creationId xmlns:a16="http://schemas.microsoft.com/office/drawing/2014/main" id="{FF13F44D-7D58-399B-B876-11A9303A2A77}"/>
               </a:ext>
             </a:extLst>
@@ -4934,7 +5505,7 @@
 </p:sld>
 </file>
 
-<file path=ppt/slides/slide4.xml><?xml version="1.0" encoding="utf-8"?>
+<file path=ppt/slides/slide6.xml><?xml version="1.0" encoding="utf-8"?>
 <p:sld xmlns:a="http://schemas.openxmlformats.org/drawingml/2006/main" xmlns:r="http://schemas.openxmlformats.org/officeDocument/2006/relationships" xmlns:p="http://schemas.openxmlformats.org/presentationml/2006/main">
   <p:cSld>
     <p:spTree>

--- a/DOKUMENTUMOK/menhelybemutato 1.pptx
+++ b/DOKUMENTUMOK/menhelybemutato 1.pptx
@@ -5,18 +5,20 @@
     <p:sldMasterId id="2147483648" r:id="rId1"/>
   </p:sldMasterIdLst>
   <p:notesMasterIdLst>
-    <p:notesMasterId r:id="rId8"/>
+    <p:notesMasterId r:id="rId10"/>
   </p:notesMasterIdLst>
   <p:handoutMasterIdLst>
-    <p:handoutMasterId r:id="rId9"/>
+    <p:handoutMasterId r:id="rId11"/>
   </p:handoutMasterIdLst>
   <p:sldIdLst>
     <p:sldId id="256" r:id="rId2"/>
-    <p:sldId id="257" r:id="rId3"/>
-    <p:sldId id="260" r:id="rId4"/>
-    <p:sldId id="261" r:id="rId5"/>
-    <p:sldId id="258" r:id="rId6"/>
-    <p:sldId id="259" r:id="rId7"/>
+    <p:sldId id="262" r:id="rId3"/>
+    <p:sldId id="257" r:id="rId4"/>
+    <p:sldId id="260" r:id="rId5"/>
+    <p:sldId id="261" r:id="rId6"/>
+    <p:sldId id="258" r:id="rId7"/>
+    <p:sldId id="259" r:id="rId8"/>
+    <p:sldId id="263" r:id="rId9"/>
   </p:sldIdLst>
   <p:sldSz cx="12192000" cy="6858000"/>
   <p:notesSz cx="6858000" cy="9144000"/>
@@ -220,7 +222,7 @@
           <a:p>
             <a:fld id="{AEF91C5D-073C-45DE-BBCC-7378CE435FA1}" type="datetime1">
               <a:rPr lang="hu-HU" smtClean="0"/>
-              <a:t>2026. 01. 09.</a:t>
+              <a:t>2026. 01. 16.</a:t>
             </a:fld>
             <a:endParaRPr lang="hu-HU" dirty="0"/>
           </a:p>
@@ -398,7 +400,7 @@
             <a:fld id="{AEAFF75A-AEE5-48D5-8CB6-4873AEBB3F4C}" type="datetime1">
               <a:rPr lang="hu-HU" smtClean="0"/>
               <a:pPr/>
-              <a:t>2026. 01. 09.</a:t>
+              <a:t>2026. 01. 16.</a:t>
             </a:fld>
             <a:endParaRPr lang="hu-HU" dirty="0"/>
           </a:p>
@@ -871,7 +873,7 @@
           <a:p>
             <a:fld id="{D1A8A364-3D9A-4EC8-959B-291924AF7E56}" type="slidenum">
               <a:rPr lang="hu-HU" noProof="0" smtClean="0"/>
-              <a:t>2</a:t>
+              <a:t>3</a:t>
             </a:fld>
             <a:endParaRPr lang="hu-HU" noProof="0"/>
           </a:p>
@@ -955,7 +957,7 @@
           <a:p>
             <a:fld id="{D1A8A364-3D9A-4EC8-959B-291924AF7E56}" type="slidenum">
               <a:rPr lang="hu-HU" noProof="0" smtClean="0"/>
-              <a:t>3</a:t>
+              <a:t>4</a:t>
             </a:fld>
             <a:endParaRPr lang="hu-HU" noProof="0"/>
           </a:p>
@@ -1114,7 +1116,7 @@
             <a:pPr rtl="0"/>
             <a:fld id="{4357C712-04B1-43F6-A268-30DD1DB5F6B9}" type="datetime1">
               <a:rPr lang="hu-HU" noProof="0" smtClean="0"/>
-              <a:t>2026. 01. 09.</a:t>
+              <a:t>2026. 01. 16.</a:t>
             </a:fld>
             <a:endParaRPr lang="hu-HU" noProof="0"/>
           </a:p>
@@ -1322,7 +1324,7 @@
             <a:pPr rtl="0"/>
             <a:fld id="{37F7EF17-0CEC-4E1D-AEE0-AF901F2B6DF3}" type="datetime1">
               <a:rPr lang="hu-HU" noProof="0" smtClean="0"/>
-              <a:t>2026. 01. 09.</a:t>
+              <a:t>2026. 01. 16.</a:t>
             </a:fld>
             <a:endParaRPr lang="hu-HU" noProof="0"/>
           </a:p>
@@ -1534,7 +1536,7 @@
             <a:pPr rtl="0"/>
             <a:fld id="{7A490ACC-DB94-4540-9689-013867EC8522}" type="datetime1">
               <a:rPr lang="hu-HU" noProof="0" smtClean="0"/>
-              <a:t>2026. 01. 09.</a:t>
+              <a:t>2026. 01. 16.</a:t>
             </a:fld>
             <a:endParaRPr lang="hu-HU" noProof="0"/>
           </a:p>
@@ -1732,7 +1734,7 @@
             <a:pPr rtl="0"/>
             <a:fld id="{263C02BF-1388-4F21-B877-03B08F3169CC}" type="datetime1">
               <a:rPr lang="hu-HU" noProof="0" smtClean="0"/>
-              <a:t>2026. 01. 09.</a:t>
+              <a:t>2026. 01. 16.</a:t>
             </a:fld>
             <a:endParaRPr lang="hu-HU" noProof="0"/>
           </a:p>
@@ -2009,7 +2011,7 @@
             <a:pPr rtl="0"/>
             <a:fld id="{20ED032A-13F3-4ED4-BC67-027BABAB85B7}" type="datetime1">
               <a:rPr lang="hu-HU" noProof="0" smtClean="0"/>
-              <a:t>2026. 01. 09.</a:t>
+              <a:t>2026. 01. 16.</a:t>
             </a:fld>
             <a:endParaRPr lang="hu-HU" noProof="0"/>
           </a:p>
@@ -2273,7 +2275,7 @@
             <a:pPr rtl="0"/>
             <a:fld id="{1B63A5F8-6802-46B0-8655-054EB3F33294}" type="datetime1">
               <a:rPr lang="hu-HU" noProof="0" smtClean="0"/>
-              <a:t>2026. 01. 09.</a:t>
+              <a:t>2026. 01. 16.</a:t>
             </a:fld>
             <a:endParaRPr lang="hu-HU" noProof="0"/>
           </a:p>
@@ -2685,7 +2687,7 @@
             <a:pPr rtl="0"/>
             <a:fld id="{9BD259E6-F7D8-40B4-9CB6-4D3A05A7DB1B}" type="datetime1">
               <a:rPr lang="hu-HU" noProof="0" smtClean="0"/>
-              <a:t>2026. 01. 09.</a:t>
+              <a:t>2026. 01. 16.</a:t>
             </a:fld>
             <a:endParaRPr lang="hu-HU" noProof="0"/>
           </a:p>
@@ -2832,7 +2834,7 @@
             <a:pPr rtl="0"/>
             <a:fld id="{BFB5B7E0-EB02-4D60-87FB-F8D56D6AF0A1}" type="datetime1">
               <a:rPr lang="hu-HU" noProof="0" smtClean="0"/>
-              <a:t>2026. 01. 09.</a:t>
+              <a:t>2026. 01. 16.</a:t>
             </a:fld>
             <a:endParaRPr lang="hu-HU" noProof="0"/>
           </a:p>
@@ -2956,7 +2958,7 @@
             <a:pPr rtl="0"/>
             <a:fld id="{31A187BE-59B2-40D1-AFF9-4EF9E6191442}" type="datetime1">
               <a:rPr lang="hu-HU" noProof="0" smtClean="0"/>
-              <a:t>2026. 01. 09.</a:t>
+              <a:t>2026. 01. 16.</a:t>
             </a:fld>
             <a:endParaRPr lang="hu-HU" noProof="0"/>
           </a:p>
@@ -3204,7 +3206,7 @@
             <a:pPr rtl="0"/>
             <a:fld id="{045A636F-6057-47D2-9DFE-4EF30B79ACEE}" type="datetime1">
               <a:rPr lang="hu-HU" noProof="0" smtClean="0"/>
-              <a:t>2026. 01. 09.</a:t>
+              <a:t>2026. 01. 16.</a:t>
             </a:fld>
             <a:endParaRPr lang="hu-HU" noProof="0"/>
           </a:p>
@@ -3647,7 +3649,7 @@
             <a:pPr rtl="0"/>
             <a:fld id="{C8C4B5B9-172A-4BBF-8B01-E9076FCA0CEB}" type="datetime1">
               <a:rPr lang="hu-HU" noProof="0" smtClean="0"/>
-              <a:t>2026. 01. 09.</a:t>
+              <a:t>2026. 01. 16.</a:t>
             </a:fld>
             <a:endParaRPr lang="hu-HU" noProof="0"/>
           </a:p>
@@ -3971,7 +3973,7 @@
             <a:pPr rtl="0"/>
             <a:fld id="{54064E28-58B8-4DA9-B1C8-AF15F279E04B}" type="datetime1">
               <a:rPr lang="hu-HU" noProof="0" smtClean="0"/>
-              <a:t>2026. 01. 09.</a:t>
+              <a:t>2026. 01. 16.</a:t>
             </a:fld>
             <a:endParaRPr lang="hu-HU" noProof="0"/>
           </a:p>
@@ -4547,14 +4549,6 @@
               <a:rPr lang="hu-HU" dirty="0" err="1"/>
               <a:t>norbert</a:t>
             </a:r>
-            <a:r>
-              <a:rPr lang="hu-HU" dirty="0"/>
-              <a:t>, szentpáli </a:t>
-            </a:r>
-            <a:r>
-              <a:rPr lang="hu-HU" dirty="0" err="1"/>
-              <a:t>richárd</a:t>
-            </a:r>
             <a:endParaRPr lang="hu-HU" dirty="0"/>
           </a:p>
           <a:p>
@@ -4733,7 +4727,7 @@
           <p:cNvPr id="2" name="Cím 1">
             <a:extLst>
               <a:ext uri="{FF2B5EF4-FFF2-40B4-BE49-F238E27FC236}">
-                <a16:creationId xmlns:a16="http://schemas.microsoft.com/office/drawing/2014/main" id="{01641C46-8749-FD67-6342-A9049A401477}"/>
+                <a16:creationId xmlns:a16="http://schemas.microsoft.com/office/drawing/2014/main" id="{C3896F56-1C9E-45C2-8D0A-6F258001F134}"/>
               </a:ext>
             </a:extLst>
           </p:cNvPr>
@@ -4744,58 +4738,79 @@
             <p:ph type="title"/>
           </p:nvPr>
         </p:nvSpPr>
-        <p:spPr>
-          <a:xfrm>
-            <a:off x="571500" y="257945"/>
-            <a:ext cx="9603275" cy="1049235"/>
-          </a:xfrm>
-        </p:spPr>
+        <p:spPr/>
         <p:txBody>
           <a:bodyPr/>
           <a:lstStyle/>
           <a:p>
             <a:r>
-              <a:rPr lang="en-US" dirty="0"/>
-              <a:t>What is this site about...</a:t>
-            </a:r>
-            <a:endParaRPr lang="hu-HU" dirty="0"/>
-          </a:p>
-        </p:txBody>
-      </p:sp>
-      <p:pic>
-        <p:nvPicPr>
-          <p:cNvPr id="7" name="Kép 6">
+              <a:rPr lang="hu-HU" dirty="0" err="1"/>
+              <a:t>Whatis</a:t>
+            </a:r>
+            <a:r>
+              <a:rPr lang="hu-HU" dirty="0"/>
+              <a:t> </a:t>
+            </a:r>
+            <a:r>
+              <a:rPr lang="hu-HU" dirty="0" err="1"/>
+              <a:t>this</a:t>
+            </a:r>
+            <a:r>
+              <a:rPr lang="hu-HU" dirty="0"/>
+              <a:t> site </a:t>
+            </a:r>
+            <a:r>
+              <a:rPr lang="hu-HU" dirty="0" err="1"/>
+              <a:t>about</a:t>
+            </a:r>
+            <a:r>
+              <a:rPr lang="hu-HU" dirty="0"/>
+              <a:t>...</a:t>
+            </a:r>
+          </a:p>
+        </p:txBody>
+      </p:sp>
+      <p:sp>
+        <p:nvSpPr>
+          <p:cNvPr id="3" name="Tartalom helye 2">
             <a:extLst>
               <a:ext uri="{FF2B5EF4-FFF2-40B4-BE49-F238E27FC236}">
-                <a16:creationId xmlns:a16="http://schemas.microsoft.com/office/drawing/2014/main" id="{474625CE-276C-48E3-B095-1D227AFED00B}"/>
+                <a16:creationId xmlns:a16="http://schemas.microsoft.com/office/drawing/2014/main" id="{6223AA14-7D3B-49D5-9563-4C0D52CDD551}"/>
               </a:ext>
             </a:extLst>
           </p:cNvPr>
-          <p:cNvPicPr>
-            <a:picLocks noChangeAspect="1"/>
-          </p:cNvPicPr>
-          <p:nvPr/>
-        </p:nvPicPr>
-        <p:blipFill>
-          <a:blip r:embed="rId3"/>
-          <a:stretch>
-            <a:fillRect/>
-          </a:stretch>
-        </p:blipFill>
-        <p:spPr>
-          <a:xfrm>
-            <a:off x="571500" y="1049235"/>
-            <a:ext cx="11048999" cy="5550820"/>
-          </a:xfrm>
-          <a:prstGeom prst="rect">
-            <a:avLst/>
-          </a:prstGeom>
-        </p:spPr>
-      </p:pic>
+          <p:cNvSpPr>
+            <a:spLocks noGrp="1"/>
+          </p:cNvSpPr>
+          <p:nvPr>
+            <p:ph idx="1"/>
+          </p:nvPr>
+        </p:nvSpPr>
+        <p:spPr/>
+        <p:txBody>
+          <a:bodyPr/>
+          <a:lstStyle/>
+          <a:p>
+            <a:r>
+              <a:rPr lang="en-US" dirty="0"/>
+              <a:t>Our website deals with adoptable dogs, offering a wide selection ranging from 8-10 weeks old to 5 years old. </a:t>
+            </a:r>
+            <a:r>
+              <a:rPr lang="hu-HU" dirty="0"/>
+              <a:t> </a:t>
+            </a:r>
+            <a:r>
+              <a:rPr lang="en-US" dirty="0"/>
+              <a:t>With just a few clicks and a phone call, you can pick up your new pet the very next day and give it the home of its dreams.</a:t>
+            </a:r>
+            <a:endParaRPr lang="hu-HU" dirty="0"/>
+          </a:p>
+        </p:txBody>
+      </p:sp>
     </p:spTree>
     <p:extLst>
       <p:ext uri="{BB962C8B-B14F-4D97-AF65-F5344CB8AC3E}">
-        <p14:creationId xmlns:p14="http://schemas.microsoft.com/office/powerpoint/2010/main" val="2006405743"/>
+        <p14:creationId xmlns:p14="http://schemas.microsoft.com/office/powerpoint/2010/main" val="1130802998"/>
       </p:ext>
     </p:extLst>
   </p:cSld>
@@ -4827,7 +4842,7 @@
           <p:cNvPr id="2" name="Cím 1">
             <a:extLst>
               <a:ext uri="{FF2B5EF4-FFF2-40B4-BE49-F238E27FC236}">
-                <a16:creationId xmlns:a16="http://schemas.microsoft.com/office/drawing/2014/main" id="{317103D2-A76A-47AB-92D4-E42F72993C7E}"/>
+                <a16:creationId xmlns:a16="http://schemas.microsoft.com/office/drawing/2014/main" id="{01641C46-8749-FD67-6342-A9049A401477}"/>
               </a:ext>
             </a:extLst>
           </p:cNvPr>
@@ -4840,7 +4855,7 @@
         </p:nvSpPr>
         <p:spPr>
           <a:xfrm>
-            <a:off x="1294362" y="610555"/>
+            <a:off x="571500" y="257945"/>
             <a:ext cx="9603275" cy="1049235"/>
           </a:xfrm>
         </p:spPr>
@@ -4849,32 +4864,8 @@
           <a:lstStyle/>
           <a:p>
             <a:r>
-              <a:rPr lang="hu-HU" dirty="0" err="1"/>
-              <a:t>Our</a:t>
-            </a:r>
-            <a:r>
-              <a:rPr lang="hu-HU" dirty="0"/>
-              <a:t> </a:t>
-            </a:r>
-            <a:r>
-              <a:rPr lang="hu-HU" dirty="0" err="1"/>
-              <a:t>Dogs</a:t>
-            </a:r>
-            <a:r>
-              <a:rPr lang="hu-HU" dirty="0"/>
-              <a:t> </a:t>
-            </a:r>
-            <a:r>
-              <a:rPr lang="hu-HU" dirty="0" err="1"/>
-              <a:t>for</a:t>
-            </a:r>
-            <a:r>
-              <a:rPr lang="hu-HU" dirty="0"/>
-              <a:t> </a:t>
-            </a:r>
-            <a:r>
-              <a:rPr lang="hu-HU" dirty="0" err="1"/>
-              <a:t>Adoption</a:t>
+              <a:rPr lang="en-US" dirty="0"/>
+              <a:t>What is this site about...</a:t>
             </a:r>
             <a:endParaRPr lang="hu-HU" dirty="0"/>
           </a:p>
@@ -4882,106 +4873,10 @@
       </p:sp>
       <p:pic>
         <p:nvPicPr>
-          <p:cNvPr id="5" name="Tartalom helye 4">
+          <p:cNvPr id="7" name="Kép 6">
             <a:extLst>
               <a:ext uri="{FF2B5EF4-FFF2-40B4-BE49-F238E27FC236}">
-                <a16:creationId xmlns:a16="http://schemas.microsoft.com/office/drawing/2014/main" id="{2793E94D-544F-486F-BF63-CCBEA4936367}"/>
-              </a:ext>
-            </a:extLst>
-          </p:cNvPr>
-          <p:cNvPicPr>
-            <a:picLocks noGrp="1" noChangeAspect="1"/>
-          </p:cNvPicPr>
-          <p:nvPr>
-            <p:ph idx="1"/>
-          </p:nvPr>
-        </p:nvPicPr>
-        <p:blipFill>
-          <a:blip r:embed="rId3"/>
-          <a:stretch>
-            <a:fillRect/>
-          </a:stretch>
-        </p:blipFill>
-        <p:spPr>
-          <a:xfrm>
-            <a:off x="212778" y="3879275"/>
-            <a:ext cx="4875114" cy="2036763"/>
-          </a:xfrm>
-        </p:spPr>
-      </p:pic>
-      <p:sp>
-        <p:nvSpPr>
-          <p:cNvPr id="6" name="Szövegdoboz 5">
-            <a:extLst>
-              <a:ext uri="{FF2B5EF4-FFF2-40B4-BE49-F238E27FC236}">
-                <a16:creationId xmlns:a16="http://schemas.microsoft.com/office/drawing/2014/main" id="{2513D95C-00AF-450C-878E-7C2037EA0DCC}"/>
-              </a:ext>
-            </a:extLst>
-          </p:cNvPr>
-          <p:cNvSpPr txBox="1"/>
-          <p:nvPr/>
-        </p:nvSpPr>
-        <p:spPr>
-          <a:xfrm>
-            <a:off x="379033" y="2193853"/>
-            <a:ext cx="4142509" cy="1477328"/>
-          </a:xfrm>
-          <a:prstGeom prst="rect">
-            <a:avLst/>
-          </a:prstGeom>
-          <a:noFill/>
-        </p:spPr>
-        <p:txBody>
-          <a:bodyPr wrap="square" rtlCol="0">
-            <a:spAutoFit/>
-          </a:bodyPr>
-          <a:lstStyle/>
-          <a:p>
-            <a:r>
-              <a:rPr lang="en-US" b="1" i="0" dirty="0">
-                <a:effectLst/>
-                <a:latin typeface="Roboto" panose="020B0604020202020204" pitchFamily="2" charset="0"/>
-              </a:rPr>
-              <a:t>Here you can see our dogs available for adoption</a:t>
-            </a:r>
-            <a:endParaRPr lang="hu-HU" b="1" i="0" dirty="0">
-              <a:effectLst/>
-              <a:latin typeface="Roboto" panose="020B0604020202020204" pitchFamily="2" charset="0"/>
-            </a:endParaRPr>
-          </a:p>
-          <a:p>
-            <a:r>
-              <a:rPr lang="en-US" b="1" i="0" dirty="0">
-                <a:effectLst/>
-                <a:latin typeface="Roboto" panose="02000000000000000000" pitchFamily="2" charset="0"/>
-              </a:rPr>
-              <a:t>If you click on one of the dogs, it will take you further and show you some information about it.</a:t>
-            </a:r>
-            <a:r>
-              <a:rPr lang="hu-HU" b="1" i="0" dirty="0">
-                <a:effectLst/>
-                <a:latin typeface="Roboto" panose="02000000000000000000" pitchFamily="2" charset="0"/>
-              </a:rPr>
-              <a:t> 			</a:t>
-            </a:r>
-            <a:r>
-              <a:rPr lang="hu-HU" b="1" i="0" dirty="0">
-                <a:effectLst/>
-                <a:latin typeface="Roboto" panose="02000000000000000000" pitchFamily="2" charset="0"/>
-                <a:sym typeface="Wingdings" panose="05000000000000000000" pitchFamily="2" charset="2"/>
-              </a:rPr>
-              <a:t></a:t>
-            </a:r>
-            <a:endParaRPr lang="hu-HU" dirty="0"/>
-          </a:p>
-        </p:txBody>
-      </p:sp>
-      <p:pic>
-        <p:nvPicPr>
-          <p:cNvPr id="8" name="Kép 7">
-            <a:extLst>
-              <a:ext uri="{FF2B5EF4-FFF2-40B4-BE49-F238E27FC236}">
-                <a16:creationId xmlns:a16="http://schemas.microsoft.com/office/drawing/2014/main" id="{F5296E3A-E97A-468A-ACEB-BE1520D9605A}"/>
+                <a16:creationId xmlns:a16="http://schemas.microsoft.com/office/drawing/2014/main" id="{474625CE-276C-48E3-B095-1D227AFED00B}"/>
               </a:ext>
             </a:extLst>
           </p:cNvPr>
@@ -4991,144 +4886,25 @@
           <p:nvPr/>
         </p:nvPicPr>
         <p:blipFill>
-          <a:blip r:embed="rId4"/>
+          <a:blip r:embed="rId3"/>
           <a:stretch>
             <a:fillRect/>
           </a:stretch>
         </p:blipFill>
         <p:spPr>
           <a:xfrm>
-            <a:off x="5708073" y="1492657"/>
-            <a:ext cx="2220112" cy="2395055"/>
+            <a:off x="571500" y="1049235"/>
+            <a:ext cx="11048999" cy="5550820"/>
           </a:xfrm>
           <a:prstGeom prst="rect">
             <a:avLst/>
           </a:prstGeom>
         </p:spPr>
       </p:pic>
-      <p:sp>
-        <p:nvSpPr>
-          <p:cNvPr id="9" name="Szövegdoboz 8">
-            <a:extLst>
-              <a:ext uri="{FF2B5EF4-FFF2-40B4-BE49-F238E27FC236}">
-                <a16:creationId xmlns:a16="http://schemas.microsoft.com/office/drawing/2014/main" id="{233FF872-122A-4F6D-AEE5-8A5E39ED7E6B}"/>
-              </a:ext>
-            </a:extLst>
-          </p:cNvPr>
-          <p:cNvSpPr txBox="1"/>
-          <p:nvPr/>
-        </p:nvSpPr>
-        <p:spPr>
-          <a:xfrm>
-            <a:off x="8381071" y="2193853"/>
-            <a:ext cx="2327564" cy="1477328"/>
-          </a:xfrm>
-          <a:prstGeom prst="rect">
-            <a:avLst/>
-          </a:prstGeom>
-          <a:noFill/>
-        </p:spPr>
-        <p:txBody>
-          <a:bodyPr wrap="square" rtlCol="0">
-            <a:spAutoFit/>
-          </a:bodyPr>
-          <a:lstStyle/>
-          <a:p>
-            <a:r>
-              <a:rPr lang="en-US" b="1" i="0" dirty="0">
-                <a:effectLst/>
-                <a:latin typeface="Roboto" panose="02000000000000000000" pitchFamily="2" charset="0"/>
-              </a:rPr>
-              <a:t>Here you can see the details about him, and if you like the dog, you can click on adoption.</a:t>
-            </a:r>
-            <a:endParaRPr lang="hu-HU" dirty="0"/>
-          </a:p>
-        </p:txBody>
-      </p:sp>
-      <p:cxnSp>
-        <p:nvCxnSpPr>
-          <p:cNvPr id="12" name="Egyenes összekötő nyíllal 11">
-            <a:extLst>
-              <a:ext uri="{FF2B5EF4-FFF2-40B4-BE49-F238E27FC236}">
-                <a16:creationId xmlns:a16="http://schemas.microsoft.com/office/drawing/2014/main" id="{3074986D-EA00-468D-BFFB-1CAB0849F983}"/>
-              </a:ext>
-            </a:extLst>
-          </p:cNvPr>
-          <p:cNvCxnSpPr>
-            <a:cxnSpLocks/>
-          </p:cNvCxnSpPr>
-          <p:nvPr/>
-        </p:nvCxnSpPr>
-        <p:spPr>
-          <a:xfrm flipH="1">
-            <a:off x="7104110" y="3546764"/>
-            <a:ext cx="1831143" cy="124417"/>
-          </a:xfrm>
-          <a:prstGeom prst="straightConnector1">
-            <a:avLst/>
-          </a:prstGeom>
-          <a:ln>
-            <a:tailEnd type="triangle"/>
-          </a:ln>
-        </p:spPr>
-        <p:style>
-          <a:lnRef idx="1">
-            <a:schemeClr val="accent1"/>
-          </a:lnRef>
-          <a:fillRef idx="0">
-            <a:schemeClr val="accent1"/>
-          </a:fillRef>
-          <a:effectRef idx="0">
-            <a:schemeClr val="accent1"/>
-          </a:effectRef>
-          <a:fontRef idx="minor">
-            <a:schemeClr val="tx1"/>
-          </a:fontRef>
-        </p:style>
-      </p:cxnSp>
-      <p:sp>
-        <p:nvSpPr>
-          <p:cNvPr id="14" name="Szövegdoboz 13">
-            <a:extLst>
-              <a:ext uri="{FF2B5EF4-FFF2-40B4-BE49-F238E27FC236}">
-                <a16:creationId xmlns:a16="http://schemas.microsoft.com/office/drawing/2014/main" id="{8749B88F-A4BD-4B80-A707-824C41AE83DC}"/>
-              </a:ext>
-            </a:extLst>
-          </p:cNvPr>
-          <p:cNvSpPr txBox="1"/>
-          <p:nvPr/>
-        </p:nvSpPr>
-        <p:spPr>
-          <a:xfrm>
-            <a:off x="5587068" y="4311941"/>
-            <a:ext cx="6392154" cy="923330"/>
-          </a:xfrm>
-          <a:prstGeom prst="rect">
-            <a:avLst/>
-          </a:prstGeom>
-          <a:noFill/>
-        </p:spPr>
-        <p:txBody>
-          <a:bodyPr wrap="square" rtlCol="0">
-            <a:spAutoFit/>
-          </a:bodyPr>
-          <a:lstStyle/>
-          <a:p>
-            <a:r>
-              <a:rPr lang="en-US" b="1" i="0" dirty="0">
-                <a:effectLst/>
-                <a:latin typeface="Roboto" panose="02000000000000000000" pitchFamily="2" charset="0"/>
-              </a:rPr>
-              <a:t>As soon as you fill out the form with your information, we will receive the request and review it as quickly as possible and get back to you.</a:t>
-            </a:r>
-            <a:endParaRPr lang="hu-HU" dirty="0"/>
-          </a:p>
-        </p:txBody>
-      </p:sp>
     </p:spTree>
     <p:extLst>
       <p:ext uri="{BB962C8B-B14F-4D97-AF65-F5344CB8AC3E}">
-        <p14:creationId xmlns:p14="http://schemas.microsoft.com/office/powerpoint/2010/main" val="1653305199"/>
+        <p14:creationId xmlns:p14="http://schemas.microsoft.com/office/powerpoint/2010/main" val="2006405743"/>
       </p:ext>
     </p:extLst>
   </p:cSld>
@@ -5160,6 +4936,339 @@
           <p:cNvPr id="2" name="Cím 1">
             <a:extLst>
               <a:ext uri="{FF2B5EF4-FFF2-40B4-BE49-F238E27FC236}">
+                <a16:creationId xmlns:a16="http://schemas.microsoft.com/office/drawing/2014/main" id="{317103D2-A76A-47AB-92D4-E42F72993C7E}"/>
+              </a:ext>
+            </a:extLst>
+          </p:cNvPr>
+          <p:cNvSpPr>
+            <a:spLocks noGrp="1"/>
+          </p:cNvSpPr>
+          <p:nvPr>
+            <p:ph type="title"/>
+          </p:nvPr>
+        </p:nvSpPr>
+        <p:spPr>
+          <a:xfrm>
+            <a:off x="1294362" y="610555"/>
+            <a:ext cx="9603275" cy="1049235"/>
+          </a:xfrm>
+        </p:spPr>
+        <p:txBody>
+          <a:bodyPr/>
+          <a:lstStyle/>
+          <a:p>
+            <a:r>
+              <a:rPr lang="hu-HU" dirty="0" err="1"/>
+              <a:t>Our</a:t>
+            </a:r>
+            <a:r>
+              <a:rPr lang="hu-HU" dirty="0"/>
+              <a:t> </a:t>
+            </a:r>
+            <a:r>
+              <a:rPr lang="hu-HU" dirty="0" err="1"/>
+              <a:t>Dogs</a:t>
+            </a:r>
+            <a:r>
+              <a:rPr lang="hu-HU" dirty="0"/>
+              <a:t> </a:t>
+            </a:r>
+            <a:r>
+              <a:rPr lang="hu-HU" dirty="0" err="1"/>
+              <a:t>for</a:t>
+            </a:r>
+            <a:r>
+              <a:rPr lang="hu-HU" dirty="0"/>
+              <a:t> </a:t>
+            </a:r>
+            <a:r>
+              <a:rPr lang="hu-HU" dirty="0" err="1"/>
+              <a:t>Adoption</a:t>
+            </a:r>
+            <a:endParaRPr lang="hu-HU" dirty="0"/>
+          </a:p>
+        </p:txBody>
+      </p:sp>
+      <p:pic>
+        <p:nvPicPr>
+          <p:cNvPr id="5" name="Tartalom helye 4">
+            <a:extLst>
+              <a:ext uri="{FF2B5EF4-FFF2-40B4-BE49-F238E27FC236}">
+                <a16:creationId xmlns:a16="http://schemas.microsoft.com/office/drawing/2014/main" id="{2793E94D-544F-486F-BF63-CCBEA4936367}"/>
+              </a:ext>
+            </a:extLst>
+          </p:cNvPr>
+          <p:cNvPicPr>
+            <a:picLocks noGrp="1" noChangeAspect="1"/>
+          </p:cNvPicPr>
+          <p:nvPr>
+            <p:ph idx="1"/>
+          </p:nvPr>
+        </p:nvPicPr>
+        <p:blipFill>
+          <a:blip r:embed="rId3"/>
+          <a:stretch>
+            <a:fillRect/>
+          </a:stretch>
+        </p:blipFill>
+        <p:spPr>
+          <a:xfrm>
+            <a:off x="212778" y="3879275"/>
+            <a:ext cx="4875114" cy="2036763"/>
+          </a:xfrm>
+        </p:spPr>
+      </p:pic>
+      <p:sp>
+        <p:nvSpPr>
+          <p:cNvPr id="6" name="Szövegdoboz 5">
+            <a:extLst>
+              <a:ext uri="{FF2B5EF4-FFF2-40B4-BE49-F238E27FC236}">
+                <a16:creationId xmlns:a16="http://schemas.microsoft.com/office/drawing/2014/main" id="{2513D95C-00AF-450C-878E-7C2037EA0DCC}"/>
+              </a:ext>
+            </a:extLst>
+          </p:cNvPr>
+          <p:cNvSpPr txBox="1"/>
+          <p:nvPr/>
+        </p:nvSpPr>
+        <p:spPr>
+          <a:xfrm>
+            <a:off x="379033" y="2193853"/>
+            <a:ext cx="4142509" cy="1477328"/>
+          </a:xfrm>
+          <a:prstGeom prst="rect">
+            <a:avLst/>
+          </a:prstGeom>
+          <a:noFill/>
+        </p:spPr>
+        <p:txBody>
+          <a:bodyPr wrap="square" rtlCol="0">
+            <a:spAutoFit/>
+          </a:bodyPr>
+          <a:lstStyle/>
+          <a:p>
+            <a:r>
+              <a:rPr lang="en-US" b="1" i="0" dirty="0">
+                <a:effectLst/>
+                <a:latin typeface="Roboto" panose="020B0604020202020204" pitchFamily="2" charset="0"/>
+              </a:rPr>
+              <a:t>Here you can see our dogs available for adoption</a:t>
+            </a:r>
+            <a:endParaRPr lang="hu-HU" b="1" i="0" dirty="0">
+              <a:effectLst/>
+              <a:latin typeface="Roboto" panose="020B0604020202020204" pitchFamily="2" charset="0"/>
+            </a:endParaRPr>
+          </a:p>
+          <a:p>
+            <a:r>
+              <a:rPr lang="en-US" b="1" i="0" dirty="0">
+                <a:effectLst/>
+                <a:latin typeface="Roboto" panose="02000000000000000000" pitchFamily="2" charset="0"/>
+              </a:rPr>
+              <a:t>If you click on one of the dogs, it will take you further and show you some information about it.</a:t>
+            </a:r>
+            <a:r>
+              <a:rPr lang="hu-HU" b="1" i="0" dirty="0">
+                <a:effectLst/>
+                <a:latin typeface="Roboto" panose="02000000000000000000" pitchFamily="2" charset="0"/>
+              </a:rPr>
+              <a:t> 			</a:t>
+            </a:r>
+            <a:r>
+              <a:rPr lang="hu-HU" b="1" i="0" dirty="0">
+                <a:effectLst/>
+                <a:latin typeface="Roboto" panose="02000000000000000000" pitchFamily="2" charset="0"/>
+                <a:sym typeface="Wingdings" panose="05000000000000000000" pitchFamily="2" charset="2"/>
+              </a:rPr>
+              <a:t></a:t>
+            </a:r>
+            <a:endParaRPr lang="hu-HU" dirty="0"/>
+          </a:p>
+        </p:txBody>
+      </p:sp>
+      <p:pic>
+        <p:nvPicPr>
+          <p:cNvPr id="8" name="Kép 7">
+            <a:extLst>
+              <a:ext uri="{FF2B5EF4-FFF2-40B4-BE49-F238E27FC236}">
+                <a16:creationId xmlns:a16="http://schemas.microsoft.com/office/drawing/2014/main" id="{F5296E3A-E97A-468A-ACEB-BE1520D9605A}"/>
+              </a:ext>
+            </a:extLst>
+          </p:cNvPr>
+          <p:cNvPicPr>
+            <a:picLocks noChangeAspect="1"/>
+          </p:cNvPicPr>
+          <p:nvPr/>
+        </p:nvPicPr>
+        <p:blipFill>
+          <a:blip r:embed="rId4"/>
+          <a:stretch>
+            <a:fillRect/>
+          </a:stretch>
+        </p:blipFill>
+        <p:spPr>
+          <a:xfrm>
+            <a:off x="5708073" y="1492657"/>
+            <a:ext cx="2220112" cy="2395055"/>
+          </a:xfrm>
+          <a:prstGeom prst="rect">
+            <a:avLst/>
+          </a:prstGeom>
+        </p:spPr>
+      </p:pic>
+      <p:sp>
+        <p:nvSpPr>
+          <p:cNvPr id="9" name="Szövegdoboz 8">
+            <a:extLst>
+              <a:ext uri="{FF2B5EF4-FFF2-40B4-BE49-F238E27FC236}">
+                <a16:creationId xmlns:a16="http://schemas.microsoft.com/office/drawing/2014/main" id="{233FF872-122A-4F6D-AEE5-8A5E39ED7E6B}"/>
+              </a:ext>
+            </a:extLst>
+          </p:cNvPr>
+          <p:cNvSpPr txBox="1"/>
+          <p:nvPr/>
+        </p:nvSpPr>
+        <p:spPr>
+          <a:xfrm>
+            <a:off x="8381071" y="2193853"/>
+            <a:ext cx="2327564" cy="1477328"/>
+          </a:xfrm>
+          <a:prstGeom prst="rect">
+            <a:avLst/>
+          </a:prstGeom>
+          <a:noFill/>
+        </p:spPr>
+        <p:txBody>
+          <a:bodyPr wrap="square" rtlCol="0">
+            <a:spAutoFit/>
+          </a:bodyPr>
+          <a:lstStyle/>
+          <a:p>
+            <a:r>
+              <a:rPr lang="en-US" b="1" i="0" dirty="0">
+                <a:effectLst/>
+                <a:latin typeface="Roboto" panose="02000000000000000000" pitchFamily="2" charset="0"/>
+              </a:rPr>
+              <a:t>Here you can see the details about him, and if you like the dog, you can click on adoption.</a:t>
+            </a:r>
+            <a:endParaRPr lang="hu-HU" dirty="0"/>
+          </a:p>
+        </p:txBody>
+      </p:sp>
+      <p:cxnSp>
+        <p:nvCxnSpPr>
+          <p:cNvPr id="12" name="Egyenes összekötő nyíllal 11">
+            <a:extLst>
+              <a:ext uri="{FF2B5EF4-FFF2-40B4-BE49-F238E27FC236}">
+                <a16:creationId xmlns:a16="http://schemas.microsoft.com/office/drawing/2014/main" id="{3074986D-EA00-468D-BFFB-1CAB0849F983}"/>
+              </a:ext>
+            </a:extLst>
+          </p:cNvPr>
+          <p:cNvCxnSpPr>
+            <a:cxnSpLocks/>
+          </p:cNvCxnSpPr>
+          <p:nvPr/>
+        </p:nvCxnSpPr>
+        <p:spPr>
+          <a:xfrm flipH="1">
+            <a:off x="7104110" y="3546764"/>
+            <a:ext cx="1831143" cy="124417"/>
+          </a:xfrm>
+          <a:prstGeom prst="straightConnector1">
+            <a:avLst/>
+          </a:prstGeom>
+          <a:ln>
+            <a:tailEnd type="triangle"/>
+          </a:ln>
+        </p:spPr>
+        <p:style>
+          <a:lnRef idx="1">
+            <a:schemeClr val="accent1"/>
+          </a:lnRef>
+          <a:fillRef idx="0">
+            <a:schemeClr val="accent1"/>
+          </a:fillRef>
+          <a:effectRef idx="0">
+            <a:schemeClr val="accent1"/>
+          </a:effectRef>
+          <a:fontRef idx="minor">
+            <a:schemeClr val="tx1"/>
+          </a:fontRef>
+        </p:style>
+      </p:cxnSp>
+      <p:sp>
+        <p:nvSpPr>
+          <p:cNvPr id="14" name="Szövegdoboz 13">
+            <a:extLst>
+              <a:ext uri="{FF2B5EF4-FFF2-40B4-BE49-F238E27FC236}">
+                <a16:creationId xmlns:a16="http://schemas.microsoft.com/office/drawing/2014/main" id="{8749B88F-A4BD-4B80-A707-824C41AE83DC}"/>
+              </a:ext>
+            </a:extLst>
+          </p:cNvPr>
+          <p:cNvSpPr txBox="1"/>
+          <p:nvPr/>
+        </p:nvSpPr>
+        <p:spPr>
+          <a:xfrm>
+            <a:off x="5587068" y="4311941"/>
+            <a:ext cx="6392154" cy="923330"/>
+          </a:xfrm>
+          <a:prstGeom prst="rect">
+            <a:avLst/>
+          </a:prstGeom>
+          <a:noFill/>
+        </p:spPr>
+        <p:txBody>
+          <a:bodyPr wrap="square" rtlCol="0">
+            <a:spAutoFit/>
+          </a:bodyPr>
+          <a:lstStyle/>
+          <a:p>
+            <a:r>
+              <a:rPr lang="en-US" b="1" i="0" dirty="0">
+                <a:effectLst/>
+                <a:latin typeface="Roboto" panose="02000000000000000000" pitchFamily="2" charset="0"/>
+              </a:rPr>
+              <a:t>As soon as you fill out the form with your information, we will receive the request and review it as quickly as possible and get back to you.</a:t>
+            </a:r>
+            <a:endParaRPr lang="hu-HU" dirty="0"/>
+          </a:p>
+        </p:txBody>
+      </p:sp>
+    </p:spTree>
+    <p:extLst>
+      <p:ext uri="{BB962C8B-B14F-4D97-AF65-F5344CB8AC3E}">
+        <p14:creationId xmlns:p14="http://schemas.microsoft.com/office/powerpoint/2010/main" val="1653305199"/>
+      </p:ext>
+    </p:extLst>
+  </p:cSld>
+  <p:clrMapOvr>
+    <a:masterClrMapping/>
+  </p:clrMapOvr>
+</p:sld>
+</file>
+
+<file path=ppt/slides/slide5.xml><?xml version="1.0" encoding="utf-8"?>
+<p:sld xmlns:a="http://schemas.openxmlformats.org/drawingml/2006/main" xmlns:r="http://schemas.openxmlformats.org/officeDocument/2006/relationships" xmlns:p="http://schemas.openxmlformats.org/presentationml/2006/main">
+  <p:cSld>
+    <p:spTree>
+      <p:nvGrpSpPr>
+        <p:cNvPr id="1" name=""/>
+        <p:cNvGrpSpPr/>
+        <p:nvPr/>
+      </p:nvGrpSpPr>
+      <p:grpSpPr>
+        <a:xfrm>
+          <a:off x="0" y="0"/>
+          <a:ext cx="0" cy="0"/>
+          <a:chOff x="0" y="0"/>
+          <a:chExt cx="0" cy="0"/>
+        </a:xfrm>
+      </p:grpSpPr>
+      <p:sp>
+        <p:nvSpPr>
+          <p:cNvPr id="2" name="Cím 1">
+            <a:extLst>
+              <a:ext uri="{FF2B5EF4-FFF2-40B4-BE49-F238E27FC236}">
                 <a16:creationId xmlns:a16="http://schemas.microsoft.com/office/drawing/2014/main" id="{02FD2F86-BB9D-4B98-8486-613CEB7117A6}"/>
               </a:ext>
             </a:extLst>
@@ -5290,7 +5399,7 @@
 </p:sld>
 </file>
 
-<file path=ppt/slides/slide5.xml><?xml version="1.0" encoding="utf-8"?>
+<file path=ppt/slides/slide6.xml><?xml version="1.0" encoding="utf-8"?>
 <p:sld xmlns:a="http://schemas.openxmlformats.org/drawingml/2006/main" xmlns:r="http://schemas.openxmlformats.org/officeDocument/2006/relationships" xmlns:p="http://schemas.openxmlformats.org/presentationml/2006/main">
   <p:cSld>
     <p:spTree>
@@ -5505,7 +5614,7 @@
 </p:sld>
 </file>
 
-<file path=ppt/slides/slide6.xml><?xml version="1.0" encoding="utf-8"?>
+<file path=ppt/slides/slide7.xml><?xml version="1.0" encoding="utf-8"?>
 <p:sld xmlns:a="http://schemas.openxmlformats.org/drawingml/2006/main" xmlns:r="http://schemas.openxmlformats.org/officeDocument/2006/relationships" xmlns:p="http://schemas.openxmlformats.org/presentationml/2006/main">
   <p:cSld>
     <p:spTree>
@@ -5636,6 +5745,72 @@
     <p:extLst>
       <p:ext uri="{BB962C8B-B14F-4D97-AF65-F5344CB8AC3E}">
         <p14:creationId xmlns:p14="http://schemas.microsoft.com/office/powerpoint/2010/main" val="3444963043"/>
+      </p:ext>
+    </p:extLst>
+  </p:cSld>
+  <p:clrMapOvr>
+    <a:masterClrMapping/>
+  </p:clrMapOvr>
+</p:sld>
+</file>
+
+<file path=ppt/slides/slide8.xml><?xml version="1.0" encoding="utf-8"?>
+<p:sld xmlns:a="http://schemas.openxmlformats.org/drawingml/2006/main" xmlns:r="http://schemas.openxmlformats.org/officeDocument/2006/relationships" xmlns:p="http://schemas.openxmlformats.org/presentationml/2006/main">
+  <p:cSld>
+    <p:spTree>
+      <p:nvGrpSpPr>
+        <p:cNvPr id="1" name=""/>
+        <p:cNvGrpSpPr/>
+        <p:nvPr/>
+      </p:nvGrpSpPr>
+      <p:grpSpPr>
+        <a:xfrm>
+          <a:off x="0" y="0"/>
+          <a:ext cx="0" cy="0"/>
+          <a:chOff x="0" y="0"/>
+          <a:chExt cx="0" cy="0"/>
+        </a:xfrm>
+      </p:grpSpPr>
+      <p:sp>
+        <p:nvSpPr>
+          <p:cNvPr id="2" name="Cím 1">
+            <a:extLst>
+              <a:ext uri="{FF2B5EF4-FFF2-40B4-BE49-F238E27FC236}">
+                <a16:creationId xmlns:a16="http://schemas.microsoft.com/office/drawing/2014/main" id="{9CC09913-BD67-4735-8317-4AE7FBF1A820}"/>
+              </a:ext>
+            </a:extLst>
+          </p:cNvPr>
+          <p:cNvSpPr>
+            <a:spLocks noGrp="1"/>
+          </p:cNvSpPr>
+          <p:nvPr>
+            <p:ph type="title"/>
+          </p:nvPr>
+        </p:nvSpPr>
+        <p:spPr>
+          <a:xfrm>
+            <a:off x="862315" y="2688554"/>
+            <a:ext cx="11329685" cy="1480891"/>
+          </a:xfrm>
+        </p:spPr>
+        <p:txBody>
+          <a:bodyPr>
+            <a:noAutofit/>
+          </a:bodyPr>
+          <a:lstStyle/>
+          <a:p>
+            <a:r>
+              <a:rPr lang="en-US" sz="5000" dirty="0"/>
+              <a:t>THANK YOU FOR YOUR ATTENTION</a:t>
+            </a:r>
+            <a:endParaRPr lang="hu-HU" sz="5000" dirty="0"/>
+          </a:p>
+        </p:txBody>
+      </p:sp>
+    </p:spTree>
+    <p:extLst>
+      <p:ext uri="{BB962C8B-B14F-4D97-AF65-F5344CB8AC3E}">
+        <p14:creationId xmlns:p14="http://schemas.microsoft.com/office/powerpoint/2010/main" val="3684729020"/>
       </p:ext>
     </p:extLst>
   </p:cSld>
